--- a/day41/treePart1.pptx
+++ b/day41/treePart1.pptx
@@ -12,19 +12,18 @@
     <p:sldId id="260" r:id="rId6"/>
     <p:sldId id="261" r:id="rId7"/>
     <p:sldId id="262" r:id="rId8"/>
-    <p:sldId id="263" r:id="rId9"/>
-    <p:sldId id="264" r:id="rId10"/>
-    <p:sldId id="265" r:id="rId11"/>
-    <p:sldId id="266" r:id="rId12"/>
-    <p:sldId id="267" r:id="rId13"/>
-    <p:sldId id="268" r:id="rId14"/>
-    <p:sldId id="269" r:id="rId15"/>
-    <p:sldId id="270" r:id="rId16"/>
-    <p:sldId id="271" r:id="rId17"/>
-    <p:sldId id="272" r:id="rId18"/>
-    <p:sldId id="273" r:id="rId19"/>
-    <p:sldId id="274" r:id="rId20"/>
-    <p:sldId id="275" r:id="rId21"/>
+    <p:sldId id="264" r:id="rId9"/>
+    <p:sldId id="265" r:id="rId10"/>
+    <p:sldId id="266" r:id="rId11"/>
+    <p:sldId id="267" r:id="rId12"/>
+    <p:sldId id="268" r:id="rId13"/>
+    <p:sldId id="269" r:id="rId14"/>
+    <p:sldId id="270" r:id="rId15"/>
+    <p:sldId id="271" r:id="rId16"/>
+    <p:sldId id="272" r:id="rId17"/>
+    <p:sldId id="273" r:id="rId18"/>
+    <p:sldId id="274" r:id="rId19"/>
+    <p:sldId id="275" r:id="rId20"/>
   </p:sldIdLst>
   <p:sldSz cx="12192000" cy="6858000"/>
   <p:notesSz cx="6858000" cy="9144000"/>
@@ -5809,287 +5808,6 @@
         <p:cNvPr id="1" name="">
           <a:extLst>
             <a:ext uri="{FF2B5EF4-FFF2-40B4-BE49-F238E27FC236}">
-              <a16:creationId xmlns:a16="http://schemas.microsoft.com/office/drawing/2014/main" id="{0C118ED2-F80D-388F-9E41-1CC0654B8466}"/>
-            </a:ext>
-          </a:extLst>
-        </p:cNvPr>
-        <p:cNvGrpSpPr/>
-        <p:nvPr/>
-      </p:nvGrpSpPr>
-      <p:grpSpPr>
-        <a:xfrm>
-          <a:off x="0" y="0"/>
-          <a:ext cx="0" cy="0"/>
-          <a:chOff x="0" y="0"/>
-          <a:chExt cx="0" cy="0"/>
-        </a:xfrm>
-      </p:grpSpPr>
-      <p:sp>
-        <p:nvSpPr>
-          <p:cNvPr id="7" name="Rectangle 6">
-            <a:extLst>
-              <a:ext uri="{FF2B5EF4-FFF2-40B4-BE49-F238E27FC236}">
-                <a16:creationId xmlns:a16="http://schemas.microsoft.com/office/drawing/2014/main" id="{E9589048-FA57-82AB-E47E-66881E9771A3}"/>
-              </a:ext>
-              <a:ext uri="{C183D7F6-B498-43B3-948B-1728B52AA6E4}">
-                <adec:decorative xmlns:adec="http://schemas.microsoft.com/office/drawing/2017/decorative" val="1"/>
-              </a:ext>
-            </a:extLst>
-          </p:cNvPr>
-          <p:cNvSpPr>
-            <a:spLocks noGrp="1" noRot="1" noChangeAspect="1" noMove="1" noResize="1" noEditPoints="1" noAdjustHandles="1" noChangeArrowheads="1" noChangeShapeType="1" noTextEdit="1"/>
-          </p:cNvSpPr>
-          <p:nvPr>
-            <p:extLst>
-              <p:ext uri="{386F3935-93C4-4BCD-93E2-E3B085C9AB24}">
-                <p16:designElem xmlns:p16="http://schemas.microsoft.com/office/powerpoint/2015/main" val="1"/>
-              </p:ext>
-            </p:extLst>
-          </p:nvPr>
-        </p:nvSpPr>
-        <p:spPr bwMode="white">
-          <a:xfrm>
-            <a:off x="1524" y="0"/>
-            <a:ext cx="12188952" cy="6858000"/>
-          </a:xfrm>
-          <a:prstGeom prst="rect">
-            <a:avLst/>
-          </a:prstGeom>
-          <a:noFill/>
-          <a:ln>
-            <a:noFill/>
-          </a:ln>
-        </p:spPr>
-        <p:style>
-          <a:lnRef idx="2">
-            <a:schemeClr val="accent1">
-              <a:shade val="50000"/>
-            </a:schemeClr>
-          </a:lnRef>
-          <a:fillRef idx="1">
-            <a:schemeClr val="accent1"/>
-          </a:fillRef>
-          <a:effectRef idx="0">
-            <a:schemeClr val="accent1"/>
-          </a:effectRef>
-          <a:fontRef idx="minor">
-            <a:schemeClr val="lt1"/>
-          </a:fontRef>
-        </p:style>
-        <p:txBody>
-          <a:bodyPr rtlCol="0" anchor="ctr"/>
-          <a:lstStyle>
-            <a:defPPr>
-              <a:defRPr lang="en-US"/>
-            </a:defPPr>
-            <a:lvl1pPr marL="0" algn="l" defTabSz="914400" rtl="0" eaLnBrk="1" latinLnBrk="0" hangingPunct="1">
-              <a:defRPr sz="1800" kern="1200">
-                <a:solidFill>
-                  <a:schemeClr val="lt1"/>
-                </a:solidFill>
-                <a:latin typeface="+mn-lt"/>
-                <a:ea typeface="+mn-ea"/>
-                <a:cs typeface="+mn-cs"/>
-              </a:defRPr>
-            </a:lvl1pPr>
-            <a:lvl2pPr marL="457200" algn="l" defTabSz="914400" rtl="0" eaLnBrk="1" latinLnBrk="0" hangingPunct="1">
-              <a:defRPr sz="1800" kern="1200">
-                <a:solidFill>
-                  <a:schemeClr val="lt1"/>
-                </a:solidFill>
-                <a:latin typeface="+mn-lt"/>
-                <a:ea typeface="+mn-ea"/>
-                <a:cs typeface="+mn-cs"/>
-              </a:defRPr>
-            </a:lvl2pPr>
-            <a:lvl3pPr marL="914400" algn="l" defTabSz="914400" rtl="0" eaLnBrk="1" latinLnBrk="0" hangingPunct="1">
-              <a:defRPr sz="1800" kern="1200">
-                <a:solidFill>
-                  <a:schemeClr val="lt1"/>
-                </a:solidFill>
-                <a:latin typeface="+mn-lt"/>
-                <a:ea typeface="+mn-ea"/>
-                <a:cs typeface="+mn-cs"/>
-              </a:defRPr>
-            </a:lvl3pPr>
-            <a:lvl4pPr marL="1371600" algn="l" defTabSz="914400" rtl="0" eaLnBrk="1" latinLnBrk="0" hangingPunct="1">
-              <a:defRPr sz="1800" kern="1200">
-                <a:solidFill>
-                  <a:schemeClr val="lt1"/>
-                </a:solidFill>
-                <a:latin typeface="+mn-lt"/>
-                <a:ea typeface="+mn-ea"/>
-                <a:cs typeface="+mn-cs"/>
-              </a:defRPr>
-            </a:lvl4pPr>
-            <a:lvl5pPr marL="1828800" algn="l" defTabSz="914400" rtl="0" eaLnBrk="1" latinLnBrk="0" hangingPunct="1">
-              <a:defRPr sz="1800" kern="1200">
-                <a:solidFill>
-                  <a:schemeClr val="lt1"/>
-                </a:solidFill>
-                <a:latin typeface="+mn-lt"/>
-                <a:ea typeface="+mn-ea"/>
-                <a:cs typeface="+mn-cs"/>
-              </a:defRPr>
-            </a:lvl5pPr>
-            <a:lvl6pPr marL="2286000" algn="l" defTabSz="914400" rtl="0" eaLnBrk="1" latinLnBrk="0" hangingPunct="1">
-              <a:defRPr sz="1800" kern="1200">
-                <a:solidFill>
-                  <a:schemeClr val="lt1"/>
-                </a:solidFill>
-                <a:latin typeface="+mn-lt"/>
-                <a:ea typeface="+mn-ea"/>
-                <a:cs typeface="+mn-cs"/>
-              </a:defRPr>
-            </a:lvl6pPr>
-            <a:lvl7pPr marL="2743200" algn="l" defTabSz="914400" rtl="0" eaLnBrk="1" latinLnBrk="0" hangingPunct="1">
-              <a:defRPr sz="1800" kern="1200">
-                <a:solidFill>
-                  <a:schemeClr val="lt1"/>
-                </a:solidFill>
-                <a:latin typeface="+mn-lt"/>
-                <a:ea typeface="+mn-ea"/>
-                <a:cs typeface="+mn-cs"/>
-              </a:defRPr>
-            </a:lvl7pPr>
-            <a:lvl8pPr marL="3200400" algn="l" defTabSz="914400" rtl="0" eaLnBrk="1" latinLnBrk="0" hangingPunct="1">
-              <a:defRPr sz="1800" kern="1200">
-                <a:solidFill>
-                  <a:schemeClr val="lt1"/>
-                </a:solidFill>
-                <a:latin typeface="+mn-lt"/>
-                <a:ea typeface="+mn-ea"/>
-                <a:cs typeface="+mn-cs"/>
-              </a:defRPr>
-            </a:lvl8pPr>
-            <a:lvl9pPr marL="3657600" algn="l" defTabSz="914400" rtl="0" eaLnBrk="1" latinLnBrk="0" hangingPunct="1">
-              <a:defRPr sz="1800" kern="1200">
-                <a:solidFill>
-                  <a:schemeClr val="lt1"/>
-                </a:solidFill>
-                <a:latin typeface="+mn-lt"/>
-                <a:ea typeface="+mn-ea"/>
-                <a:cs typeface="+mn-cs"/>
-              </a:defRPr>
-            </a:lvl9pPr>
-          </a:lstStyle>
-          <a:p>
-            <a:pPr algn="ctr"/>
-            <a:endParaRPr lang="en-US"/>
-          </a:p>
-        </p:txBody>
-      </p:sp>
-      <p:pic>
-        <p:nvPicPr>
-          <p:cNvPr id="2" name="Picture 1">
-            <a:extLst>
-              <a:ext uri="{FF2B5EF4-FFF2-40B4-BE49-F238E27FC236}">
-                <a16:creationId xmlns:a16="http://schemas.microsoft.com/office/drawing/2014/main" id="{9C3AB4E4-3ABF-995A-4B3F-8E094EFBBAE4}"/>
-              </a:ext>
-            </a:extLst>
-          </p:cNvPr>
-          <p:cNvPicPr>
-            <a:picLocks noChangeAspect="1"/>
-          </p:cNvPicPr>
-          <p:nvPr/>
-        </p:nvPicPr>
-        <p:blipFill>
-          <a:blip r:embed="rId2"/>
-          <a:srcRect b="19"/>
-          <a:stretch>
-            <a:fillRect/>
-          </a:stretch>
-        </p:blipFill>
-        <p:spPr>
-          <a:xfrm>
-            <a:off x="20" y="1282"/>
-            <a:ext cx="12191980" cy="6856718"/>
-          </a:xfrm>
-          <a:prstGeom prst="rect">
-            <a:avLst/>
-          </a:prstGeom>
-        </p:spPr>
-      </p:pic>
-      <mc:AlternateContent xmlns:mc="http://schemas.openxmlformats.org/markup-compatibility/2006">
-        <mc:Choice xmlns:p14="http://schemas.microsoft.com/office/powerpoint/2010/main" Requires="p14">
-          <p:contentPart p14:bwMode="auto" r:id="rId3">
-            <p14:nvContentPartPr>
-              <p14:cNvPr id="3" name="Ink 2">
-                <a:extLst>
-                  <a:ext uri="{FF2B5EF4-FFF2-40B4-BE49-F238E27FC236}">
-                    <a16:creationId xmlns:a16="http://schemas.microsoft.com/office/drawing/2014/main" id="{F6F94ED1-0626-97FB-1D0D-2C3A32386AE0}"/>
-                  </a:ext>
-                </a:extLst>
-              </p14:cNvPr>
-              <p14:cNvContentPartPr/>
-              <p14:nvPr/>
-            </p14:nvContentPartPr>
-            <p14:xfrm>
-              <a:off x="279000" y="667800"/>
-              <a:ext cx="11634480" cy="5640840"/>
-            </p14:xfrm>
-          </p:contentPart>
-        </mc:Choice>
-        <mc:Fallback>
-          <p:pic>
-            <p:nvPicPr>
-              <p:cNvPr id="3" name="Ink 2">
-                <a:extLst>
-                  <a:ext uri="{FF2B5EF4-FFF2-40B4-BE49-F238E27FC236}">
-                    <a16:creationId xmlns:a16="http://schemas.microsoft.com/office/drawing/2014/main" id="{F6F94ED1-0626-97FB-1D0D-2C3A32386AE0}"/>
-                  </a:ext>
-                </a:extLst>
-              </p:cNvPr>
-              <p:cNvPicPr/>
-              <p:nvPr/>
-            </p:nvPicPr>
-            <p:blipFill>
-              <a:blip r:embed="rId4"/>
-              <a:stretch>
-                <a:fillRect/>
-              </a:stretch>
-            </p:blipFill>
-            <p:spPr>
-              <a:xfrm>
-                <a:off x="269640" y="658440"/>
-                <a:ext cx="11653200" cy="5659560"/>
-              </a:xfrm>
-              <a:prstGeom prst="rect">
-                <a:avLst/>
-              </a:prstGeom>
-            </p:spPr>
-          </p:pic>
-        </mc:Fallback>
-      </mc:AlternateContent>
-    </p:spTree>
-    <p:extLst>
-      <p:ext uri="{BB962C8B-B14F-4D97-AF65-F5344CB8AC3E}">
-        <p14:creationId xmlns:p14="http://schemas.microsoft.com/office/powerpoint/2010/main" val="748854165"/>
-      </p:ext>
-    </p:extLst>
-  </p:cSld>
-  <p:clrMapOvr>
-    <a:masterClrMapping/>
-  </p:clrMapOvr>
-</p:sld>
-</file>
-
-<file path=ppt/slides/slide11.xml><?xml version="1.0" encoding="utf-8"?>
-<p:sld xmlns:a="http://schemas.openxmlformats.org/drawingml/2006/main" xmlns:r="http://schemas.openxmlformats.org/officeDocument/2006/relationships" xmlns:p="http://schemas.openxmlformats.org/presentationml/2006/main">
-  <p:cSld>
-    <p:bg>
-      <p:bgPr>
-        <a:solidFill>
-          <a:schemeClr val="bg1"/>
-        </a:solidFill>
-        <a:effectLst/>
-      </p:bgPr>
-    </p:bg>
-    <p:spTree>
-      <p:nvGrpSpPr>
-        <p:cNvPr id="1" name="">
-          <a:extLst>
-            <a:ext uri="{FF2B5EF4-FFF2-40B4-BE49-F238E27FC236}">
               <a16:creationId xmlns:a16="http://schemas.microsoft.com/office/drawing/2014/main" id="{999A8BEA-1E17-CAC9-0F52-0AE08E7F7CAB}"/>
             </a:ext>
           </a:extLst>
@@ -6355,7 +6073,7 @@
 </p:sld>
 </file>
 
-<file path=ppt/slides/slide12.xml><?xml version="1.0" encoding="utf-8"?>
+<file path=ppt/slides/slide11.xml><?xml version="1.0" encoding="utf-8"?>
 <p:sld xmlns:a="http://schemas.openxmlformats.org/drawingml/2006/main" xmlns:r="http://schemas.openxmlformats.org/officeDocument/2006/relationships" xmlns:p="http://schemas.openxmlformats.org/presentationml/2006/main">
   <p:cSld>
     <p:bg>
@@ -6636,7 +6354,7 @@
 </p:sld>
 </file>
 
-<file path=ppt/slides/slide13.xml><?xml version="1.0" encoding="utf-8"?>
+<file path=ppt/slides/slide12.xml><?xml version="1.0" encoding="utf-8"?>
 <p:sld xmlns:a="http://schemas.openxmlformats.org/drawingml/2006/main" xmlns:r="http://schemas.openxmlformats.org/officeDocument/2006/relationships" xmlns:p="http://schemas.openxmlformats.org/presentationml/2006/main">
   <p:cSld>
     <p:bg>
@@ -6917,7 +6635,7 @@
 </p:sld>
 </file>
 
-<file path=ppt/slides/slide14.xml><?xml version="1.0" encoding="utf-8"?>
+<file path=ppt/slides/slide13.xml><?xml version="1.0" encoding="utf-8"?>
 <p:sld xmlns:a="http://schemas.openxmlformats.org/drawingml/2006/main" xmlns:r="http://schemas.openxmlformats.org/officeDocument/2006/relationships" xmlns:p="http://schemas.openxmlformats.org/presentationml/2006/main">
   <p:cSld>
     <p:bg>
@@ -7198,7 +6916,7 @@
 </p:sld>
 </file>
 
-<file path=ppt/slides/slide15.xml><?xml version="1.0" encoding="utf-8"?>
+<file path=ppt/slides/slide14.xml><?xml version="1.0" encoding="utf-8"?>
 <p:sld xmlns:a="http://schemas.openxmlformats.org/drawingml/2006/main" xmlns:r="http://schemas.openxmlformats.org/officeDocument/2006/relationships" xmlns:p="http://schemas.openxmlformats.org/presentationml/2006/main">
   <p:cSld>
     <p:bg>
@@ -7479,7 +7197,7 @@
 </p:sld>
 </file>
 
-<file path=ppt/slides/slide16.xml><?xml version="1.0" encoding="utf-8"?>
+<file path=ppt/slides/slide15.xml><?xml version="1.0" encoding="utf-8"?>
 <p:sld xmlns:a="http://schemas.openxmlformats.org/drawingml/2006/main" xmlns:r="http://schemas.openxmlformats.org/officeDocument/2006/relationships" xmlns:p="http://schemas.openxmlformats.org/presentationml/2006/main">
   <p:cSld>
     <p:bg>
@@ -7760,7 +7478,7 @@
 </p:sld>
 </file>
 
-<file path=ppt/slides/slide17.xml><?xml version="1.0" encoding="utf-8"?>
+<file path=ppt/slides/slide16.xml><?xml version="1.0" encoding="utf-8"?>
 <p:sld xmlns:a="http://schemas.openxmlformats.org/drawingml/2006/main" xmlns:r="http://schemas.openxmlformats.org/officeDocument/2006/relationships" xmlns:p="http://schemas.openxmlformats.org/presentationml/2006/main">
   <p:cSld>
     <p:bg>
@@ -8041,7 +7759,7 @@
 </p:sld>
 </file>
 
-<file path=ppt/slides/slide18.xml><?xml version="1.0" encoding="utf-8"?>
+<file path=ppt/slides/slide17.xml><?xml version="1.0" encoding="utf-8"?>
 <p:sld xmlns:a="http://schemas.openxmlformats.org/drawingml/2006/main" xmlns:r="http://schemas.openxmlformats.org/officeDocument/2006/relationships" xmlns:p="http://schemas.openxmlformats.org/presentationml/2006/main">
   <p:cSld>
     <p:bg>
@@ -8322,7 +8040,7 @@
 </p:sld>
 </file>
 
-<file path=ppt/slides/slide19.xml><?xml version="1.0" encoding="utf-8"?>
+<file path=ppt/slides/slide18.xml><?xml version="1.0" encoding="utf-8"?>
 <p:sld xmlns:a="http://schemas.openxmlformats.org/drawingml/2006/main" xmlns:r="http://schemas.openxmlformats.org/officeDocument/2006/relationships" xmlns:p="http://schemas.openxmlformats.org/presentationml/2006/main">
   <p:cSld>
     <p:bg>
@@ -8603,6 +8321,287 @@
 </p:sld>
 </file>
 
+<file path=ppt/slides/slide19.xml><?xml version="1.0" encoding="utf-8"?>
+<p:sld xmlns:a="http://schemas.openxmlformats.org/drawingml/2006/main" xmlns:r="http://schemas.openxmlformats.org/officeDocument/2006/relationships" xmlns:p="http://schemas.openxmlformats.org/presentationml/2006/main">
+  <p:cSld>
+    <p:bg>
+      <p:bgPr>
+        <a:solidFill>
+          <a:schemeClr val="bg1"/>
+        </a:solidFill>
+        <a:effectLst/>
+      </p:bgPr>
+    </p:bg>
+    <p:spTree>
+      <p:nvGrpSpPr>
+        <p:cNvPr id="1" name="">
+          <a:extLst>
+            <a:ext uri="{FF2B5EF4-FFF2-40B4-BE49-F238E27FC236}">
+              <a16:creationId xmlns:a16="http://schemas.microsoft.com/office/drawing/2014/main" id="{AB7AC9C8-E000-51DA-313B-3FA0B53ED22C}"/>
+            </a:ext>
+          </a:extLst>
+        </p:cNvPr>
+        <p:cNvGrpSpPr/>
+        <p:nvPr/>
+      </p:nvGrpSpPr>
+      <p:grpSpPr>
+        <a:xfrm>
+          <a:off x="0" y="0"/>
+          <a:ext cx="0" cy="0"/>
+          <a:chOff x="0" y="0"/>
+          <a:chExt cx="0" cy="0"/>
+        </a:xfrm>
+      </p:grpSpPr>
+      <p:sp>
+        <p:nvSpPr>
+          <p:cNvPr id="7" name="Rectangle 6">
+            <a:extLst>
+              <a:ext uri="{FF2B5EF4-FFF2-40B4-BE49-F238E27FC236}">
+                <a16:creationId xmlns:a16="http://schemas.microsoft.com/office/drawing/2014/main" id="{6B9086EA-992E-7CD2-0727-9EA6B1AFE374}"/>
+              </a:ext>
+              <a:ext uri="{C183D7F6-B498-43B3-948B-1728B52AA6E4}">
+                <adec:decorative xmlns:adec="http://schemas.microsoft.com/office/drawing/2017/decorative" val="1"/>
+              </a:ext>
+            </a:extLst>
+          </p:cNvPr>
+          <p:cNvSpPr>
+            <a:spLocks noGrp="1" noRot="1" noChangeAspect="1" noMove="1" noResize="1" noEditPoints="1" noAdjustHandles="1" noChangeArrowheads="1" noChangeShapeType="1" noTextEdit="1"/>
+          </p:cNvSpPr>
+          <p:nvPr>
+            <p:extLst>
+              <p:ext uri="{386F3935-93C4-4BCD-93E2-E3B085C9AB24}">
+                <p16:designElem xmlns:p16="http://schemas.microsoft.com/office/powerpoint/2015/main" val="1"/>
+              </p:ext>
+            </p:extLst>
+          </p:nvPr>
+        </p:nvSpPr>
+        <p:spPr bwMode="white">
+          <a:xfrm>
+            <a:off x="1524" y="0"/>
+            <a:ext cx="12188952" cy="6858000"/>
+          </a:xfrm>
+          <a:prstGeom prst="rect">
+            <a:avLst/>
+          </a:prstGeom>
+          <a:noFill/>
+          <a:ln>
+            <a:noFill/>
+          </a:ln>
+        </p:spPr>
+        <p:style>
+          <a:lnRef idx="2">
+            <a:schemeClr val="accent1">
+              <a:shade val="50000"/>
+            </a:schemeClr>
+          </a:lnRef>
+          <a:fillRef idx="1">
+            <a:schemeClr val="accent1"/>
+          </a:fillRef>
+          <a:effectRef idx="0">
+            <a:schemeClr val="accent1"/>
+          </a:effectRef>
+          <a:fontRef idx="minor">
+            <a:schemeClr val="lt1"/>
+          </a:fontRef>
+        </p:style>
+        <p:txBody>
+          <a:bodyPr rtlCol="0" anchor="ctr"/>
+          <a:lstStyle>
+            <a:defPPr>
+              <a:defRPr lang="en-US"/>
+            </a:defPPr>
+            <a:lvl1pPr marL="0" algn="l" defTabSz="914400" rtl="0" eaLnBrk="1" latinLnBrk="0" hangingPunct="1">
+              <a:defRPr sz="1800" kern="1200">
+                <a:solidFill>
+                  <a:schemeClr val="lt1"/>
+                </a:solidFill>
+                <a:latin typeface="+mn-lt"/>
+                <a:ea typeface="+mn-ea"/>
+                <a:cs typeface="+mn-cs"/>
+              </a:defRPr>
+            </a:lvl1pPr>
+            <a:lvl2pPr marL="457200" algn="l" defTabSz="914400" rtl="0" eaLnBrk="1" latinLnBrk="0" hangingPunct="1">
+              <a:defRPr sz="1800" kern="1200">
+                <a:solidFill>
+                  <a:schemeClr val="lt1"/>
+                </a:solidFill>
+                <a:latin typeface="+mn-lt"/>
+                <a:ea typeface="+mn-ea"/>
+                <a:cs typeface="+mn-cs"/>
+              </a:defRPr>
+            </a:lvl2pPr>
+            <a:lvl3pPr marL="914400" algn="l" defTabSz="914400" rtl="0" eaLnBrk="1" latinLnBrk="0" hangingPunct="1">
+              <a:defRPr sz="1800" kern="1200">
+                <a:solidFill>
+                  <a:schemeClr val="lt1"/>
+                </a:solidFill>
+                <a:latin typeface="+mn-lt"/>
+                <a:ea typeface="+mn-ea"/>
+                <a:cs typeface="+mn-cs"/>
+              </a:defRPr>
+            </a:lvl3pPr>
+            <a:lvl4pPr marL="1371600" algn="l" defTabSz="914400" rtl="0" eaLnBrk="1" latinLnBrk="0" hangingPunct="1">
+              <a:defRPr sz="1800" kern="1200">
+                <a:solidFill>
+                  <a:schemeClr val="lt1"/>
+                </a:solidFill>
+                <a:latin typeface="+mn-lt"/>
+                <a:ea typeface="+mn-ea"/>
+                <a:cs typeface="+mn-cs"/>
+              </a:defRPr>
+            </a:lvl4pPr>
+            <a:lvl5pPr marL="1828800" algn="l" defTabSz="914400" rtl="0" eaLnBrk="1" latinLnBrk="0" hangingPunct="1">
+              <a:defRPr sz="1800" kern="1200">
+                <a:solidFill>
+                  <a:schemeClr val="lt1"/>
+                </a:solidFill>
+                <a:latin typeface="+mn-lt"/>
+                <a:ea typeface="+mn-ea"/>
+                <a:cs typeface="+mn-cs"/>
+              </a:defRPr>
+            </a:lvl5pPr>
+            <a:lvl6pPr marL="2286000" algn="l" defTabSz="914400" rtl="0" eaLnBrk="1" latinLnBrk="0" hangingPunct="1">
+              <a:defRPr sz="1800" kern="1200">
+                <a:solidFill>
+                  <a:schemeClr val="lt1"/>
+                </a:solidFill>
+                <a:latin typeface="+mn-lt"/>
+                <a:ea typeface="+mn-ea"/>
+                <a:cs typeface="+mn-cs"/>
+              </a:defRPr>
+            </a:lvl6pPr>
+            <a:lvl7pPr marL="2743200" algn="l" defTabSz="914400" rtl="0" eaLnBrk="1" latinLnBrk="0" hangingPunct="1">
+              <a:defRPr sz="1800" kern="1200">
+                <a:solidFill>
+                  <a:schemeClr val="lt1"/>
+                </a:solidFill>
+                <a:latin typeface="+mn-lt"/>
+                <a:ea typeface="+mn-ea"/>
+                <a:cs typeface="+mn-cs"/>
+              </a:defRPr>
+            </a:lvl7pPr>
+            <a:lvl8pPr marL="3200400" algn="l" defTabSz="914400" rtl="0" eaLnBrk="1" latinLnBrk="0" hangingPunct="1">
+              <a:defRPr sz="1800" kern="1200">
+                <a:solidFill>
+                  <a:schemeClr val="lt1"/>
+                </a:solidFill>
+                <a:latin typeface="+mn-lt"/>
+                <a:ea typeface="+mn-ea"/>
+                <a:cs typeface="+mn-cs"/>
+              </a:defRPr>
+            </a:lvl8pPr>
+            <a:lvl9pPr marL="3657600" algn="l" defTabSz="914400" rtl="0" eaLnBrk="1" latinLnBrk="0" hangingPunct="1">
+              <a:defRPr sz="1800" kern="1200">
+                <a:solidFill>
+                  <a:schemeClr val="lt1"/>
+                </a:solidFill>
+                <a:latin typeface="+mn-lt"/>
+                <a:ea typeface="+mn-ea"/>
+                <a:cs typeface="+mn-cs"/>
+              </a:defRPr>
+            </a:lvl9pPr>
+          </a:lstStyle>
+          <a:p>
+            <a:pPr algn="ctr"/>
+            <a:endParaRPr lang="en-US"/>
+          </a:p>
+        </p:txBody>
+      </p:sp>
+      <p:pic>
+        <p:nvPicPr>
+          <p:cNvPr id="2" name="Picture 1">
+            <a:extLst>
+              <a:ext uri="{FF2B5EF4-FFF2-40B4-BE49-F238E27FC236}">
+                <a16:creationId xmlns:a16="http://schemas.microsoft.com/office/drawing/2014/main" id="{5AB27191-4CDF-C810-A879-1C900DD31D01}"/>
+              </a:ext>
+            </a:extLst>
+          </p:cNvPr>
+          <p:cNvPicPr>
+            <a:picLocks noChangeAspect="1"/>
+          </p:cNvPicPr>
+          <p:nvPr/>
+        </p:nvPicPr>
+        <p:blipFill>
+          <a:blip r:embed="rId2"/>
+          <a:srcRect b="19"/>
+          <a:stretch>
+            <a:fillRect/>
+          </a:stretch>
+        </p:blipFill>
+        <p:spPr>
+          <a:xfrm>
+            <a:off x="20" y="1282"/>
+            <a:ext cx="12191980" cy="6856718"/>
+          </a:xfrm>
+          <a:prstGeom prst="rect">
+            <a:avLst/>
+          </a:prstGeom>
+        </p:spPr>
+      </p:pic>
+      <mc:AlternateContent xmlns:mc="http://schemas.openxmlformats.org/markup-compatibility/2006">
+        <mc:Choice xmlns:p14="http://schemas.microsoft.com/office/powerpoint/2010/main" Requires="p14">
+          <p:contentPart p14:bwMode="auto" r:id="rId3">
+            <p14:nvContentPartPr>
+              <p14:cNvPr id="3" name="Ink 2">
+                <a:extLst>
+                  <a:ext uri="{FF2B5EF4-FFF2-40B4-BE49-F238E27FC236}">
+                    <a16:creationId xmlns:a16="http://schemas.microsoft.com/office/drawing/2014/main" id="{33FE3D98-6BE3-86C8-9200-CCC70C8B2AAE}"/>
+                  </a:ext>
+                </a:extLst>
+              </p14:cNvPr>
+              <p14:cNvContentPartPr/>
+              <p14:nvPr/>
+            </p14:nvContentPartPr>
+            <p14:xfrm>
+              <a:off x="825120" y="637920"/>
+              <a:ext cx="7347240" cy="3471480"/>
+            </p14:xfrm>
+          </p:contentPart>
+        </mc:Choice>
+        <mc:Fallback>
+          <p:pic>
+            <p:nvPicPr>
+              <p:cNvPr id="3" name="Ink 2">
+                <a:extLst>
+                  <a:ext uri="{FF2B5EF4-FFF2-40B4-BE49-F238E27FC236}">
+                    <a16:creationId xmlns:a16="http://schemas.microsoft.com/office/drawing/2014/main" id="{33FE3D98-6BE3-86C8-9200-CCC70C8B2AAE}"/>
+                  </a:ext>
+                </a:extLst>
+              </p:cNvPr>
+              <p:cNvPicPr/>
+              <p:nvPr/>
+            </p:nvPicPr>
+            <p:blipFill>
+              <a:blip r:embed="rId4"/>
+              <a:stretch>
+                <a:fillRect/>
+              </a:stretch>
+            </p:blipFill>
+            <p:spPr>
+              <a:xfrm>
+                <a:off x="815760" y="628560"/>
+                <a:ext cx="7365960" cy="3490200"/>
+              </a:xfrm>
+              <a:prstGeom prst="rect">
+                <a:avLst/>
+              </a:prstGeom>
+            </p:spPr>
+          </p:pic>
+        </mc:Fallback>
+      </mc:AlternateContent>
+    </p:spTree>
+    <p:extLst>
+      <p:ext uri="{BB962C8B-B14F-4D97-AF65-F5344CB8AC3E}">
+        <p14:creationId xmlns:p14="http://schemas.microsoft.com/office/powerpoint/2010/main" val="702225372"/>
+      </p:ext>
+    </p:extLst>
+  </p:cSld>
+  <p:clrMapOvr>
+    <a:masterClrMapping/>
+  </p:clrMapOvr>
+</p:sld>
+</file>
+
 <file path=ppt/slides/slide2.xml><?xml version="1.0" encoding="utf-8"?>
 <p:sld xmlns:a="http://schemas.openxmlformats.org/drawingml/2006/main" xmlns:r="http://schemas.openxmlformats.org/officeDocument/2006/relationships" xmlns:p="http://schemas.openxmlformats.org/presentationml/2006/main">
   <p:cSld>
@@ -8869,287 +8868,6 @@
     <p:extLst>
       <p:ext uri="{BB962C8B-B14F-4D97-AF65-F5344CB8AC3E}">
         <p14:creationId xmlns:p14="http://schemas.microsoft.com/office/powerpoint/2010/main" val="2424335880"/>
-      </p:ext>
-    </p:extLst>
-  </p:cSld>
-  <p:clrMapOvr>
-    <a:masterClrMapping/>
-  </p:clrMapOvr>
-</p:sld>
-</file>
-
-<file path=ppt/slides/slide20.xml><?xml version="1.0" encoding="utf-8"?>
-<p:sld xmlns:a="http://schemas.openxmlformats.org/drawingml/2006/main" xmlns:r="http://schemas.openxmlformats.org/officeDocument/2006/relationships" xmlns:p="http://schemas.openxmlformats.org/presentationml/2006/main">
-  <p:cSld>
-    <p:bg>
-      <p:bgPr>
-        <a:solidFill>
-          <a:schemeClr val="bg1"/>
-        </a:solidFill>
-        <a:effectLst/>
-      </p:bgPr>
-    </p:bg>
-    <p:spTree>
-      <p:nvGrpSpPr>
-        <p:cNvPr id="1" name="">
-          <a:extLst>
-            <a:ext uri="{FF2B5EF4-FFF2-40B4-BE49-F238E27FC236}">
-              <a16:creationId xmlns:a16="http://schemas.microsoft.com/office/drawing/2014/main" id="{AB7AC9C8-E000-51DA-313B-3FA0B53ED22C}"/>
-            </a:ext>
-          </a:extLst>
-        </p:cNvPr>
-        <p:cNvGrpSpPr/>
-        <p:nvPr/>
-      </p:nvGrpSpPr>
-      <p:grpSpPr>
-        <a:xfrm>
-          <a:off x="0" y="0"/>
-          <a:ext cx="0" cy="0"/>
-          <a:chOff x="0" y="0"/>
-          <a:chExt cx="0" cy="0"/>
-        </a:xfrm>
-      </p:grpSpPr>
-      <p:sp>
-        <p:nvSpPr>
-          <p:cNvPr id="7" name="Rectangle 6">
-            <a:extLst>
-              <a:ext uri="{FF2B5EF4-FFF2-40B4-BE49-F238E27FC236}">
-                <a16:creationId xmlns:a16="http://schemas.microsoft.com/office/drawing/2014/main" id="{6B9086EA-992E-7CD2-0727-9EA6B1AFE374}"/>
-              </a:ext>
-              <a:ext uri="{C183D7F6-B498-43B3-948B-1728B52AA6E4}">
-                <adec:decorative xmlns:adec="http://schemas.microsoft.com/office/drawing/2017/decorative" val="1"/>
-              </a:ext>
-            </a:extLst>
-          </p:cNvPr>
-          <p:cNvSpPr>
-            <a:spLocks noGrp="1" noRot="1" noChangeAspect="1" noMove="1" noResize="1" noEditPoints="1" noAdjustHandles="1" noChangeArrowheads="1" noChangeShapeType="1" noTextEdit="1"/>
-          </p:cNvSpPr>
-          <p:nvPr>
-            <p:extLst>
-              <p:ext uri="{386F3935-93C4-4BCD-93E2-E3B085C9AB24}">
-                <p16:designElem xmlns:p16="http://schemas.microsoft.com/office/powerpoint/2015/main" val="1"/>
-              </p:ext>
-            </p:extLst>
-          </p:nvPr>
-        </p:nvSpPr>
-        <p:spPr bwMode="white">
-          <a:xfrm>
-            <a:off x="1524" y="0"/>
-            <a:ext cx="12188952" cy="6858000"/>
-          </a:xfrm>
-          <a:prstGeom prst="rect">
-            <a:avLst/>
-          </a:prstGeom>
-          <a:noFill/>
-          <a:ln>
-            <a:noFill/>
-          </a:ln>
-        </p:spPr>
-        <p:style>
-          <a:lnRef idx="2">
-            <a:schemeClr val="accent1">
-              <a:shade val="50000"/>
-            </a:schemeClr>
-          </a:lnRef>
-          <a:fillRef idx="1">
-            <a:schemeClr val="accent1"/>
-          </a:fillRef>
-          <a:effectRef idx="0">
-            <a:schemeClr val="accent1"/>
-          </a:effectRef>
-          <a:fontRef idx="minor">
-            <a:schemeClr val="lt1"/>
-          </a:fontRef>
-        </p:style>
-        <p:txBody>
-          <a:bodyPr rtlCol="0" anchor="ctr"/>
-          <a:lstStyle>
-            <a:defPPr>
-              <a:defRPr lang="en-US"/>
-            </a:defPPr>
-            <a:lvl1pPr marL="0" algn="l" defTabSz="914400" rtl="0" eaLnBrk="1" latinLnBrk="0" hangingPunct="1">
-              <a:defRPr sz="1800" kern="1200">
-                <a:solidFill>
-                  <a:schemeClr val="lt1"/>
-                </a:solidFill>
-                <a:latin typeface="+mn-lt"/>
-                <a:ea typeface="+mn-ea"/>
-                <a:cs typeface="+mn-cs"/>
-              </a:defRPr>
-            </a:lvl1pPr>
-            <a:lvl2pPr marL="457200" algn="l" defTabSz="914400" rtl="0" eaLnBrk="1" latinLnBrk="0" hangingPunct="1">
-              <a:defRPr sz="1800" kern="1200">
-                <a:solidFill>
-                  <a:schemeClr val="lt1"/>
-                </a:solidFill>
-                <a:latin typeface="+mn-lt"/>
-                <a:ea typeface="+mn-ea"/>
-                <a:cs typeface="+mn-cs"/>
-              </a:defRPr>
-            </a:lvl2pPr>
-            <a:lvl3pPr marL="914400" algn="l" defTabSz="914400" rtl="0" eaLnBrk="1" latinLnBrk="0" hangingPunct="1">
-              <a:defRPr sz="1800" kern="1200">
-                <a:solidFill>
-                  <a:schemeClr val="lt1"/>
-                </a:solidFill>
-                <a:latin typeface="+mn-lt"/>
-                <a:ea typeface="+mn-ea"/>
-                <a:cs typeface="+mn-cs"/>
-              </a:defRPr>
-            </a:lvl3pPr>
-            <a:lvl4pPr marL="1371600" algn="l" defTabSz="914400" rtl="0" eaLnBrk="1" latinLnBrk="0" hangingPunct="1">
-              <a:defRPr sz="1800" kern="1200">
-                <a:solidFill>
-                  <a:schemeClr val="lt1"/>
-                </a:solidFill>
-                <a:latin typeface="+mn-lt"/>
-                <a:ea typeface="+mn-ea"/>
-                <a:cs typeface="+mn-cs"/>
-              </a:defRPr>
-            </a:lvl4pPr>
-            <a:lvl5pPr marL="1828800" algn="l" defTabSz="914400" rtl="0" eaLnBrk="1" latinLnBrk="0" hangingPunct="1">
-              <a:defRPr sz="1800" kern="1200">
-                <a:solidFill>
-                  <a:schemeClr val="lt1"/>
-                </a:solidFill>
-                <a:latin typeface="+mn-lt"/>
-                <a:ea typeface="+mn-ea"/>
-                <a:cs typeface="+mn-cs"/>
-              </a:defRPr>
-            </a:lvl5pPr>
-            <a:lvl6pPr marL="2286000" algn="l" defTabSz="914400" rtl="0" eaLnBrk="1" latinLnBrk="0" hangingPunct="1">
-              <a:defRPr sz="1800" kern="1200">
-                <a:solidFill>
-                  <a:schemeClr val="lt1"/>
-                </a:solidFill>
-                <a:latin typeface="+mn-lt"/>
-                <a:ea typeface="+mn-ea"/>
-                <a:cs typeface="+mn-cs"/>
-              </a:defRPr>
-            </a:lvl6pPr>
-            <a:lvl7pPr marL="2743200" algn="l" defTabSz="914400" rtl="0" eaLnBrk="1" latinLnBrk="0" hangingPunct="1">
-              <a:defRPr sz="1800" kern="1200">
-                <a:solidFill>
-                  <a:schemeClr val="lt1"/>
-                </a:solidFill>
-                <a:latin typeface="+mn-lt"/>
-                <a:ea typeface="+mn-ea"/>
-                <a:cs typeface="+mn-cs"/>
-              </a:defRPr>
-            </a:lvl7pPr>
-            <a:lvl8pPr marL="3200400" algn="l" defTabSz="914400" rtl="0" eaLnBrk="1" latinLnBrk="0" hangingPunct="1">
-              <a:defRPr sz="1800" kern="1200">
-                <a:solidFill>
-                  <a:schemeClr val="lt1"/>
-                </a:solidFill>
-                <a:latin typeface="+mn-lt"/>
-                <a:ea typeface="+mn-ea"/>
-                <a:cs typeface="+mn-cs"/>
-              </a:defRPr>
-            </a:lvl8pPr>
-            <a:lvl9pPr marL="3657600" algn="l" defTabSz="914400" rtl="0" eaLnBrk="1" latinLnBrk="0" hangingPunct="1">
-              <a:defRPr sz="1800" kern="1200">
-                <a:solidFill>
-                  <a:schemeClr val="lt1"/>
-                </a:solidFill>
-                <a:latin typeface="+mn-lt"/>
-                <a:ea typeface="+mn-ea"/>
-                <a:cs typeface="+mn-cs"/>
-              </a:defRPr>
-            </a:lvl9pPr>
-          </a:lstStyle>
-          <a:p>
-            <a:pPr algn="ctr"/>
-            <a:endParaRPr lang="en-US"/>
-          </a:p>
-        </p:txBody>
-      </p:sp>
-      <p:pic>
-        <p:nvPicPr>
-          <p:cNvPr id="2" name="Picture 1">
-            <a:extLst>
-              <a:ext uri="{FF2B5EF4-FFF2-40B4-BE49-F238E27FC236}">
-                <a16:creationId xmlns:a16="http://schemas.microsoft.com/office/drawing/2014/main" id="{5AB27191-4CDF-C810-A879-1C900DD31D01}"/>
-              </a:ext>
-            </a:extLst>
-          </p:cNvPr>
-          <p:cNvPicPr>
-            <a:picLocks noChangeAspect="1"/>
-          </p:cNvPicPr>
-          <p:nvPr/>
-        </p:nvPicPr>
-        <p:blipFill>
-          <a:blip r:embed="rId2"/>
-          <a:srcRect b="19"/>
-          <a:stretch>
-            <a:fillRect/>
-          </a:stretch>
-        </p:blipFill>
-        <p:spPr>
-          <a:xfrm>
-            <a:off x="20" y="1282"/>
-            <a:ext cx="12191980" cy="6856718"/>
-          </a:xfrm>
-          <a:prstGeom prst="rect">
-            <a:avLst/>
-          </a:prstGeom>
-        </p:spPr>
-      </p:pic>
-      <mc:AlternateContent xmlns:mc="http://schemas.openxmlformats.org/markup-compatibility/2006">
-        <mc:Choice xmlns:p14="http://schemas.microsoft.com/office/powerpoint/2010/main" Requires="p14">
-          <p:contentPart p14:bwMode="auto" r:id="rId3">
-            <p14:nvContentPartPr>
-              <p14:cNvPr id="3" name="Ink 2">
-                <a:extLst>
-                  <a:ext uri="{FF2B5EF4-FFF2-40B4-BE49-F238E27FC236}">
-                    <a16:creationId xmlns:a16="http://schemas.microsoft.com/office/drawing/2014/main" id="{33FE3D98-6BE3-86C8-9200-CCC70C8B2AAE}"/>
-                  </a:ext>
-                </a:extLst>
-              </p14:cNvPr>
-              <p14:cNvContentPartPr/>
-              <p14:nvPr/>
-            </p14:nvContentPartPr>
-            <p14:xfrm>
-              <a:off x="825120" y="637920"/>
-              <a:ext cx="7347240" cy="3471480"/>
-            </p14:xfrm>
-          </p:contentPart>
-        </mc:Choice>
-        <mc:Fallback>
-          <p:pic>
-            <p:nvPicPr>
-              <p:cNvPr id="3" name="Ink 2">
-                <a:extLst>
-                  <a:ext uri="{FF2B5EF4-FFF2-40B4-BE49-F238E27FC236}">
-                    <a16:creationId xmlns:a16="http://schemas.microsoft.com/office/drawing/2014/main" id="{33FE3D98-6BE3-86C8-9200-CCC70C8B2AAE}"/>
-                  </a:ext>
-                </a:extLst>
-              </p:cNvPr>
-              <p:cNvPicPr/>
-              <p:nvPr/>
-            </p:nvPicPr>
-            <p:blipFill>
-              <a:blip r:embed="rId4"/>
-              <a:stretch>
-                <a:fillRect/>
-              </a:stretch>
-            </p:blipFill>
-            <p:spPr>
-              <a:xfrm>
-                <a:off x="815760" y="628560"/>
-                <a:ext cx="7365960" cy="3490200"/>
-              </a:xfrm>
-              <a:prstGeom prst="rect">
-                <a:avLst/>
-              </a:prstGeom>
-            </p:spPr>
-          </p:pic>
-        </mc:Fallback>
-      </mc:AlternateContent>
-    </p:spTree>
-    <p:extLst>
-      <p:ext uri="{BB962C8B-B14F-4D97-AF65-F5344CB8AC3E}">
-        <p14:creationId xmlns:p14="http://schemas.microsoft.com/office/powerpoint/2010/main" val="702225372"/>
       </p:ext>
     </p:extLst>
   </p:cSld>
@@ -10580,236 +10298,6 @@
         <p:cNvPr id="1" name="">
           <a:extLst>
             <a:ext uri="{FF2B5EF4-FFF2-40B4-BE49-F238E27FC236}">
-              <a16:creationId xmlns:a16="http://schemas.microsoft.com/office/drawing/2014/main" id="{002D1060-263C-B352-E044-84A176C94FA7}"/>
-            </a:ext>
-          </a:extLst>
-        </p:cNvPr>
-        <p:cNvGrpSpPr/>
-        <p:nvPr/>
-      </p:nvGrpSpPr>
-      <p:grpSpPr>
-        <a:xfrm>
-          <a:off x="0" y="0"/>
-          <a:ext cx="0" cy="0"/>
-          <a:chOff x="0" y="0"/>
-          <a:chExt cx="0" cy="0"/>
-        </a:xfrm>
-      </p:grpSpPr>
-      <p:sp>
-        <p:nvSpPr>
-          <p:cNvPr id="7" name="Rectangle 6">
-            <a:extLst>
-              <a:ext uri="{FF2B5EF4-FFF2-40B4-BE49-F238E27FC236}">
-                <a16:creationId xmlns:a16="http://schemas.microsoft.com/office/drawing/2014/main" id="{FADE1BAD-FCC5-B1F6-E7ED-7D0999D8F6D8}"/>
-              </a:ext>
-              <a:ext uri="{C183D7F6-B498-43B3-948B-1728B52AA6E4}">
-                <adec:decorative xmlns:adec="http://schemas.microsoft.com/office/drawing/2017/decorative" val="1"/>
-              </a:ext>
-            </a:extLst>
-          </p:cNvPr>
-          <p:cNvSpPr>
-            <a:spLocks noGrp="1" noRot="1" noChangeAspect="1" noMove="1" noResize="1" noEditPoints="1" noAdjustHandles="1" noChangeArrowheads="1" noChangeShapeType="1" noTextEdit="1"/>
-          </p:cNvSpPr>
-          <p:nvPr>
-            <p:extLst>
-              <p:ext uri="{386F3935-93C4-4BCD-93E2-E3B085C9AB24}">
-                <p16:designElem xmlns:p16="http://schemas.microsoft.com/office/powerpoint/2015/main" val="1"/>
-              </p:ext>
-            </p:extLst>
-          </p:nvPr>
-        </p:nvSpPr>
-        <p:spPr bwMode="white">
-          <a:xfrm>
-            <a:off x="1524" y="0"/>
-            <a:ext cx="12188952" cy="6858000"/>
-          </a:xfrm>
-          <a:prstGeom prst="rect">
-            <a:avLst/>
-          </a:prstGeom>
-          <a:noFill/>
-          <a:ln>
-            <a:noFill/>
-          </a:ln>
-        </p:spPr>
-        <p:style>
-          <a:lnRef idx="2">
-            <a:schemeClr val="accent1">
-              <a:shade val="50000"/>
-            </a:schemeClr>
-          </a:lnRef>
-          <a:fillRef idx="1">
-            <a:schemeClr val="accent1"/>
-          </a:fillRef>
-          <a:effectRef idx="0">
-            <a:schemeClr val="accent1"/>
-          </a:effectRef>
-          <a:fontRef idx="minor">
-            <a:schemeClr val="lt1"/>
-          </a:fontRef>
-        </p:style>
-        <p:txBody>
-          <a:bodyPr rtlCol="0" anchor="ctr"/>
-          <a:lstStyle>
-            <a:defPPr>
-              <a:defRPr lang="en-US"/>
-            </a:defPPr>
-            <a:lvl1pPr marL="0" algn="l" defTabSz="914400" rtl="0" eaLnBrk="1" latinLnBrk="0" hangingPunct="1">
-              <a:defRPr sz="1800" kern="1200">
-                <a:solidFill>
-                  <a:schemeClr val="lt1"/>
-                </a:solidFill>
-                <a:latin typeface="+mn-lt"/>
-                <a:ea typeface="+mn-ea"/>
-                <a:cs typeface="+mn-cs"/>
-              </a:defRPr>
-            </a:lvl1pPr>
-            <a:lvl2pPr marL="457200" algn="l" defTabSz="914400" rtl="0" eaLnBrk="1" latinLnBrk="0" hangingPunct="1">
-              <a:defRPr sz="1800" kern="1200">
-                <a:solidFill>
-                  <a:schemeClr val="lt1"/>
-                </a:solidFill>
-                <a:latin typeface="+mn-lt"/>
-                <a:ea typeface="+mn-ea"/>
-                <a:cs typeface="+mn-cs"/>
-              </a:defRPr>
-            </a:lvl2pPr>
-            <a:lvl3pPr marL="914400" algn="l" defTabSz="914400" rtl="0" eaLnBrk="1" latinLnBrk="0" hangingPunct="1">
-              <a:defRPr sz="1800" kern="1200">
-                <a:solidFill>
-                  <a:schemeClr val="lt1"/>
-                </a:solidFill>
-                <a:latin typeface="+mn-lt"/>
-                <a:ea typeface="+mn-ea"/>
-                <a:cs typeface="+mn-cs"/>
-              </a:defRPr>
-            </a:lvl3pPr>
-            <a:lvl4pPr marL="1371600" algn="l" defTabSz="914400" rtl="0" eaLnBrk="1" latinLnBrk="0" hangingPunct="1">
-              <a:defRPr sz="1800" kern="1200">
-                <a:solidFill>
-                  <a:schemeClr val="lt1"/>
-                </a:solidFill>
-                <a:latin typeface="+mn-lt"/>
-                <a:ea typeface="+mn-ea"/>
-                <a:cs typeface="+mn-cs"/>
-              </a:defRPr>
-            </a:lvl4pPr>
-            <a:lvl5pPr marL="1828800" algn="l" defTabSz="914400" rtl="0" eaLnBrk="1" latinLnBrk="0" hangingPunct="1">
-              <a:defRPr sz="1800" kern="1200">
-                <a:solidFill>
-                  <a:schemeClr val="lt1"/>
-                </a:solidFill>
-                <a:latin typeface="+mn-lt"/>
-                <a:ea typeface="+mn-ea"/>
-                <a:cs typeface="+mn-cs"/>
-              </a:defRPr>
-            </a:lvl5pPr>
-            <a:lvl6pPr marL="2286000" algn="l" defTabSz="914400" rtl="0" eaLnBrk="1" latinLnBrk="0" hangingPunct="1">
-              <a:defRPr sz="1800" kern="1200">
-                <a:solidFill>
-                  <a:schemeClr val="lt1"/>
-                </a:solidFill>
-                <a:latin typeface="+mn-lt"/>
-                <a:ea typeface="+mn-ea"/>
-                <a:cs typeface="+mn-cs"/>
-              </a:defRPr>
-            </a:lvl6pPr>
-            <a:lvl7pPr marL="2743200" algn="l" defTabSz="914400" rtl="0" eaLnBrk="1" latinLnBrk="0" hangingPunct="1">
-              <a:defRPr sz="1800" kern="1200">
-                <a:solidFill>
-                  <a:schemeClr val="lt1"/>
-                </a:solidFill>
-                <a:latin typeface="+mn-lt"/>
-                <a:ea typeface="+mn-ea"/>
-                <a:cs typeface="+mn-cs"/>
-              </a:defRPr>
-            </a:lvl7pPr>
-            <a:lvl8pPr marL="3200400" algn="l" defTabSz="914400" rtl="0" eaLnBrk="1" latinLnBrk="0" hangingPunct="1">
-              <a:defRPr sz="1800" kern="1200">
-                <a:solidFill>
-                  <a:schemeClr val="lt1"/>
-                </a:solidFill>
-                <a:latin typeface="+mn-lt"/>
-                <a:ea typeface="+mn-ea"/>
-                <a:cs typeface="+mn-cs"/>
-              </a:defRPr>
-            </a:lvl8pPr>
-            <a:lvl9pPr marL="3657600" algn="l" defTabSz="914400" rtl="0" eaLnBrk="1" latinLnBrk="0" hangingPunct="1">
-              <a:defRPr sz="1800" kern="1200">
-                <a:solidFill>
-                  <a:schemeClr val="lt1"/>
-                </a:solidFill>
-                <a:latin typeface="+mn-lt"/>
-                <a:ea typeface="+mn-ea"/>
-                <a:cs typeface="+mn-cs"/>
-              </a:defRPr>
-            </a:lvl9pPr>
-          </a:lstStyle>
-          <a:p>
-            <a:pPr algn="ctr"/>
-            <a:endParaRPr lang="en-US"/>
-          </a:p>
-        </p:txBody>
-      </p:sp>
-      <p:pic>
-        <p:nvPicPr>
-          <p:cNvPr id="2" name="Picture 1">
-            <a:extLst>
-              <a:ext uri="{FF2B5EF4-FFF2-40B4-BE49-F238E27FC236}">
-                <a16:creationId xmlns:a16="http://schemas.microsoft.com/office/drawing/2014/main" id="{593241A9-6EC9-34E3-7EC4-2ED0312EF438}"/>
-              </a:ext>
-            </a:extLst>
-          </p:cNvPr>
-          <p:cNvPicPr>
-            <a:picLocks noChangeAspect="1"/>
-          </p:cNvPicPr>
-          <p:nvPr/>
-        </p:nvPicPr>
-        <p:blipFill>
-          <a:blip r:embed="rId2"/>
-          <a:srcRect b="19"/>
-          <a:stretch>
-            <a:fillRect/>
-          </a:stretch>
-        </p:blipFill>
-        <p:spPr>
-          <a:xfrm>
-            <a:off x="20" y="1282"/>
-            <a:ext cx="12191980" cy="6856718"/>
-          </a:xfrm>
-          <a:prstGeom prst="rect">
-            <a:avLst/>
-          </a:prstGeom>
-        </p:spPr>
-      </p:pic>
-    </p:spTree>
-    <p:extLst>
-      <p:ext uri="{BB962C8B-B14F-4D97-AF65-F5344CB8AC3E}">
-        <p14:creationId xmlns:p14="http://schemas.microsoft.com/office/powerpoint/2010/main" val="3850616053"/>
-      </p:ext>
-    </p:extLst>
-  </p:cSld>
-  <p:clrMapOvr>
-    <a:masterClrMapping/>
-  </p:clrMapOvr>
-</p:sld>
-</file>
-
-<file path=ppt/slides/slide9.xml><?xml version="1.0" encoding="utf-8"?>
-<p:sld xmlns:a="http://schemas.openxmlformats.org/drawingml/2006/main" xmlns:r="http://schemas.openxmlformats.org/officeDocument/2006/relationships" xmlns:p="http://schemas.openxmlformats.org/presentationml/2006/main">
-  <p:cSld>
-    <p:bg>
-      <p:bgPr>
-        <a:solidFill>
-          <a:schemeClr val="bg1"/>
-        </a:solidFill>
-        <a:effectLst/>
-      </p:bgPr>
-    </p:bg>
-    <p:spTree>
-      <p:nvGrpSpPr>
-        <p:cNvPr id="1" name="">
-          <a:extLst>
-            <a:ext uri="{FF2B5EF4-FFF2-40B4-BE49-F238E27FC236}">
               <a16:creationId xmlns:a16="http://schemas.microsoft.com/office/drawing/2014/main" id="{7E433DA0-775C-8E10-60EA-426215A29BD4}"/>
             </a:ext>
           </a:extLst>
@@ -11066,6 +10554,287 @@
     <p:extLst>
       <p:ext uri="{BB962C8B-B14F-4D97-AF65-F5344CB8AC3E}">
         <p14:creationId xmlns:p14="http://schemas.microsoft.com/office/powerpoint/2010/main" val="719357362"/>
+      </p:ext>
+    </p:extLst>
+  </p:cSld>
+  <p:clrMapOvr>
+    <a:masterClrMapping/>
+  </p:clrMapOvr>
+</p:sld>
+</file>
+
+<file path=ppt/slides/slide9.xml><?xml version="1.0" encoding="utf-8"?>
+<p:sld xmlns:a="http://schemas.openxmlformats.org/drawingml/2006/main" xmlns:r="http://schemas.openxmlformats.org/officeDocument/2006/relationships" xmlns:p="http://schemas.openxmlformats.org/presentationml/2006/main">
+  <p:cSld>
+    <p:bg>
+      <p:bgPr>
+        <a:solidFill>
+          <a:schemeClr val="bg1"/>
+        </a:solidFill>
+        <a:effectLst/>
+      </p:bgPr>
+    </p:bg>
+    <p:spTree>
+      <p:nvGrpSpPr>
+        <p:cNvPr id="1" name="">
+          <a:extLst>
+            <a:ext uri="{FF2B5EF4-FFF2-40B4-BE49-F238E27FC236}">
+              <a16:creationId xmlns:a16="http://schemas.microsoft.com/office/drawing/2014/main" id="{0C118ED2-F80D-388F-9E41-1CC0654B8466}"/>
+            </a:ext>
+          </a:extLst>
+        </p:cNvPr>
+        <p:cNvGrpSpPr/>
+        <p:nvPr/>
+      </p:nvGrpSpPr>
+      <p:grpSpPr>
+        <a:xfrm>
+          <a:off x="0" y="0"/>
+          <a:ext cx="0" cy="0"/>
+          <a:chOff x="0" y="0"/>
+          <a:chExt cx="0" cy="0"/>
+        </a:xfrm>
+      </p:grpSpPr>
+      <p:sp>
+        <p:nvSpPr>
+          <p:cNvPr id="7" name="Rectangle 6">
+            <a:extLst>
+              <a:ext uri="{FF2B5EF4-FFF2-40B4-BE49-F238E27FC236}">
+                <a16:creationId xmlns:a16="http://schemas.microsoft.com/office/drawing/2014/main" id="{E9589048-FA57-82AB-E47E-66881E9771A3}"/>
+              </a:ext>
+              <a:ext uri="{C183D7F6-B498-43B3-948B-1728B52AA6E4}">
+                <adec:decorative xmlns:adec="http://schemas.microsoft.com/office/drawing/2017/decorative" val="1"/>
+              </a:ext>
+            </a:extLst>
+          </p:cNvPr>
+          <p:cNvSpPr>
+            <a:spLocks noGrp="1" noRot="1" noChangeAspect="1" noMove="1" noResize="1" noEditPoints="1" noAdjustHandles="1" noChangeArrowheads="1" noChangeShapeType="1" noTextEdit="1"/>
+          </p:cNvSpPr>
+          <p:nvPr>
+            <p:extLst>
+              <p:ext uri="{386F3935-93C4-4BCD-93E2-E3B085C9AB24}">
+                <p16:designElem xmlns:p16="http://schemas.microsoft.com/office/powerpoint/2015/main" val="1"/>
+              </p:ext>
+            </p:extLst>
+          </p:nvPr>
+        </p:nvSpPr>
+        <p:spPr bwMode="white">
+          <a:xfrm>
+            <a:off x="1524" y="0"/>
+            <a:ext cx="12188952" cy="6858000"/>
+          </a:xfrm>
+          <a:prstGeom prst="rect">
+            <a:avLst/>
+          </a:prstGeom>
+          <a:noFill/>
+          <a:ln>
+            <a:noFill/>
+          </a:ln>
+        </p:spPr>
+        <p:style>
+          <a:lnRef idx="2">
+            <a:schemeClr val="accent1">
+              <a:shade val="50000"/>
+            </a:schemeClr>
+          </a:lnRef>
+          <a:fillRef idx="1">
+            <a:schemeClr val="accent1"/>
+          </a:fillRef>
+          <a:effectRef idx="0">
+            <a:schemeClr val="accent1"/>
+          </a:effectRef>
+          <a:fontRef idx="minor">
+            <a:schemeClr val="lt1"/>
+          </a:fontRef>
+        </p:style>
+        <p:txBody>
+          <a:bodyPr rtlCol="0" anchor="ctr"/>
+          <a:lstStyle>
+            <a:defPPr>
+              <a:defRPr lang="en-US"/>
+            </a:defPPr>
+            <a:lvl1pPr marL="0" algn="l" defTabSz="914400" rtl="0" eaLnBrk="1" latinLnBrk="0" hangingPunct="1">
+              <a:defRPr sz="1800" kern="1200">
+                <a:solidFill>
+                  <a:schemeClr val="lt1"/>
+                </a:solidFill>
+                <a:latin typeface="+mn-lt"/>
+                <a:ea typeface="+mn-ea"/>
+                <a:cs typeface="+mn-cs"/>
+              </a:defRPr>
+            </a:lvl1pPr>
+            <a:lvl2pPr marL="457200" algn="l" defTabSz="914400" rtl="0" eaLnBrk="1" latinLnBrk="0" hangingPunct="1">
+              <a:defRPr sz="1800" kern="1200">
+                <a:solidFill>
+                  <a:schemeClr val="lt1"/>
+                </a:solidFill>
+                <a:latin typeface="+mn-lt"/>
+                <a:ea typeface="+mn-ea"/>
+                <a:cs typeface="+mn-cs"/>
+              </a:defRPr>
+            </a:lvl2pPr>
+            <a:lvl3pPr marL="914400" algn="l" defTabSz="914400" rtl="0" eaLnBrk="1" latinLnBrk="0" hangingPunct="1">
+              <a:defRPr sz="1800" kern="1200">
+                <a:solidFill>
+                  <a:schemeClr val="lt1"/>
+                </a:solidFill>
+                <a:latin typeface="+mn-lt"/>
+                <a:ea typeface="+mn-ea"/>
+                <a:cs typeface="+mn-cs"/>
+              </a:defRPr>
+            </a:lvl3pPr>
+            <a:lvl4pPr marL="1371600" algn="l" defTabSz="914400" rtl="0" eaLnBrk="1" latinLnBrk="0" hangingPunct="1">
+              <a:defRPr sz="1800" kern="1200">
+                <a:solidFill>
+                  <a:schemeClr val="lt1"/>
+                </a:solidFill>
+                <a:latin typeface="+mn-lt"/>
+                <a:ea typeface="+mn-ea"/>
+                <a:cs typeface="+mn-cs"/>
+              </a:defRPr>
+            </a:lvl4pPr>
+            <a:lvl5pPr marL="1828800" algn="l" defTabSz="914400" rtl="0" eaLnBrk="1" latinLnBrk="0" hangingPunct="1">
+              <a:defRPr sz="1800" kern="1200">
+                <a:solidFill>
+                  <a:schemeClr val="lt1"/>
+                </a:solidFill>
+                <a:latin typeface="+mn-lt"/>
+                <a:ea typeface="+mn-ea"/>
+                <a:cs typeface="+mn-cs"/>
+              </a:defRPr>
+            </a:lvl5pPr>
+            <a:lvl6pPr marL="2286000" algn="l" defTabSz="914400" rtl="0" eaLnBrk="1" latinLnBrk="0" hangingPunct="1">
+              <a:defRPr sz="1800" kern="1200">
+                <a:solidFill>
+                  <a:schemeClr val="lt1"/>
+                </a:solidFill>
+                <a:latin typeface="+mn-lt"/>
+                <a:ea typeface="+mn-ea"/>
+                <a:cs typeface="+mn-cs"/>
+              </a:defRPr>
+            </a:lvl6pPr>
+            <a:lvl7pPr marL="2743200" algn="l" defTabSz="914400" rtl="0" eaLnBrk="1" latinLnBrk="0" hangingPunct="1">
+              <a:defRPr sz="1800" kern="1200">
+                <a:solidFill>
+                  <a:schemeClr val="lt1"/>
+                </a:solidFill>
+                <a:latin typeface="+mn-lt"/>
+                <a:ea typeface="+mn-ea"/>
+                <a:cs typeface="+mn-cs"/>
+              </a:defRPr>
+            </a:lvl7pPr>
+            <a:lvl8pPr marL="3200400" algn="l" defTabSz="914400" rtl="0" eaLnBrk="1" latinLnBrk="0" hangingPunct="1">
+              <a:defRPr sz="1800" kern="1200">
+                <a:solidFill>
+                  <a:schemeClr val="lt1"/>
+                </a:solidFill>
+                <a:latin typeface="+mn-lt"/>
+                <a:ea typeface="+mn-ea"/>
+                <a:cs typeface="+mn-cs"/>
+              </a:defRPr>
+            </a:lvl8pPr>
+            <a:lvl9pPr marL="3657600" algn="l" defTabSz="914400" rtl="0" eaLnBrk="1" latinLnBrk="0" hangingPunct="1">
+              <a:defRPr sz="1800" kern="1200">
+                <a:solidFill>
+                  <a:schemeClr val="lt1"/>
+                </a:solidFill>
+                <a:latin typeface="+mn-lt"/>
+                <a:ea typeface="+mn-ea"/>
+                <a:cs typeface="+mn-cs"/>
+              </a:defRPr>
+            </a:lvl9pPr>
+          </a:lstStyle>
+          <a:p>
+            <a:pPr algn="ctr"/>
+            <a:endParaRPr lang="en-US"/>
+          </a:p>
+        </p:txBody>
+      </p:sp>
+      <p:pic>
+        <p:nvPicPr>
+          <p:cNvPr id="2" name="Picture 1">
+            <a:extLst>
+              <a:ext uri="{FF2B5EF4-FFF2-40B4-BE49-F238E27FC236}">
+                <a16:creationId xmlns:a16="http://schemas.microsoft.com/office/drawing/2014/main" id="{9C3AB4E4-3ABF-995A-4B3F-8E094EFBBAE4}"/>
+              </a:ext>
+            </a:extLst>
+          </p:cNvPr>
+          <p:cNvPicPr>
+            <a:picLocks noChangeAspect="1"/>
+          </p:cNvPicPr>
+          <p:nvPr/>
+        </p:nvPicPr>
+        <p:blipFill>
+          <a:blip r:embed="rId2"/>
+          <a:srcRect b="19"/>
+          <a:stretch>
+            <a:fillRect/>
+          </a:stretch>
+        </p:blipFill>
+        <p:spPr>
+          <a:xfrm>
+            <a:off x="20" y="1282"/>
+            <a:ext cx="12191980" cy="6856718"/>
+          </a:xfrm>
+          <a:prstGeom prst="rect">
+            <a:avLst/>
+          </a:prstGeom>
+        </p:spPr>
+      </p:pic>
+      <mc:AlternateContent xmlns:mc="http://schemas.openxmlformats.org/markup-compatibility/2006">
+        <mc:Choice xmlns:p14="http://schemas.microsoft.com/office/powerpoint/2010/main" Requires="p14">
+          <p:contentPart p14:bwMode="auto" r:id="rId3">
+            <p14:nvContentPartPr>
+              <p14:cNvPr id="3" name="Ink 2">
+                <a:extLst>
+                  <a:ext uri="{FF2B5EF4-FFF2-40B4-BE49-F238E27FC236}">
+                    <a16:creationId xmlns:a16="http://schemas.microsoft.com/office/drawing/2014/main" id="{F6F94ED1-0626-97FB-1D0D-2C3A32386AE0}"/>
+                  </a:ext>
+                </a:extLst>
+              </p14:cNvPr>
+              <p14:cNvContentPartPr/>
+              <p14:nvPr/>
+            </p14:nvContentPartPr>
+            <p14:xfrm>
+              <a:off x="279000" y="667800"/>
+              <a:ext cx="11634480" cy="5640840"/>
+            </p14:xfrm>
+          </p:contentPart>
+        </mc:Choice>
+        <mc:Fallback>
+          <p:pic>
+            <p:nvPicPr>
+              <p:cNvPr id="3" name="Ink 2">
+                <a:extLst>
+                  <a:ext uri="{FF2B5EF4-FFF2-40B4-BE49-F238E27FC236}">
+                    <a16:creationId xmlns:a16="http://schemas.microsoft.com/office/drawing/2014/main" id="{F6F94ED1-0626-97FB-1D0D-2C3A32386AE0}"/>
+                  </a:ext>
+                </a:extLst>
+              </p:cNvPr>
+              <p:cNvPicPr/>
+              <p:nvPr/>
+            </p:nvPicPr>
+            <p:blipFill>
+              <a:blip r:embed="rId4"/>
+              <a:stretch>
+                <a:fillRect/>
+              </a:stretch>
+            </p:blipFill>
+            <p:spPr>
+              <a:xfrm>
+                <a:off x="269640" y="658440"/>
+                <a:ext cx="11653200" cy="5659560"/>
+              </a:xfrm>
+              <a:prstGeom prst="rect">
+                <a:avLst/>
+              </a:prstGeom>
+            </p:spPr>
+          </p:pic>
+        </mc:Fallback>
+      </mc:AlternateContent>
+    </p:spTree>
+    <p:extLst>
+      <p:ext uri="{BB962C8B-B14F-4D97-AF65-F5344CB8AC3E}">
+        <p14:creationId xmlns:p14="http://schemas.microsoft.com/office/powerpoint/2010/main" val="748854165"/>
       </p:ext>
     </p:extLst>
   </p:cSld>
